--- a/NUMBER 1.pptx
+++ b/NUMBER 1.pptx
@@ -7918,6 +7918,36 @@
             </a:endParaRPr>
           </a:p>
           <a:p>
+            <a:pPr marL="0" marR="0" lvl="0" indent="0" algn="l" defTabSz="914400" rtl="0" eaLnBrk="0" fontAlgn="base" latinLnBrk="0" hangingPunct="0">
+              <a:lnSpc>
+                <a:spcPct val="200000"/>
+              </a:lnSpc>
+              <a:spcBef>
+                <a:spcPct val="0"/>
+              </a:spcBef>
+              <a:spcAft>
+                <a:spcPct val="0"/>
+              </a:spcAft>
+              <a:buClrTx/>
+              <a:buSzTx/>
+              <a:buNone/>
+              <a:tabLst/>
+            </a:pPr>
+            <a:r>
+              <a:rPr kumimoji="0" lang="en-US" altLang="en-US" sz="2400" i="0" u="none" strike="noStrike" cap="none" normalizeH="0" baseline="0" dirty="0">
+                <a:ln>
+                  <a:noFill/>
+                </a:ln>
+                <a:solidFill>
+                  <a:schemeClr val="tx1"/>
+                </a:solidFill>
+                <a:effectLst/>
+                <a:latin typeface="Aptos Narrow" panose="020B0004020202020204" pitchFamily="34" charset="0"/>
+              </a:rPr>
+              <a:t>Churned customers have: </a:t>
+            </a:r>
+          </a:p>
+          <a:p>
             <a:pPr marR="0" lvl="0" indent="-342900" algn="l" defTabSz="914400" rtl="0" eaLnBrk="0" fontAlgn="base" latinLnBrk="0" hangingPunct="0">
               <a:lnSpc>
                 <a:spcPct val="200000"/>
@@ -7945,7 +7975,7 @@
                 <a:effectLst/>
                 <a:latin typeface="Aptos Narrow" panose="020B0004020202020204" pitchFamily="34" charset="0"/>
               </a:rPr>
-              <a:t>Churned customers have: </a:t>
+              <a:t>Lower tenure (shorter stay) </a:t>
             </a:r>
           </a:p>
           <a:p>
@@ -7976,11 +8006,11 @@
                 <a:effectLst/>
                 <a:latin typeface="Aptos Narrow" panose="020B0004020202020204" pitchFamily="34" charset="0"/>
               </a:rPr>
-              <a:t>Lower tenure (shorter stay) </a:t>
-            </a:r>
-          </a:p>
-          <a:p>
-            <a:pPr marR="0" lvl="0" indent="-342900" algn="l" defTabSz="914400" rtl="0" eaLnBrk="0" fontAlgn="base" latinLnBrk="0" hangingPunct="0">
+              <a:t>Higher monthly charges (on average) </a:t>
+            </a:r>
+          </a:p>
+          <a:p>
+            <a:pPr marL="0" marR="0" lvl="0" indent="0" algn="l" defTabSz="914400" rtl="0" eaLnBrk="0" fontAlgn="base" latinLnBrk="0" hangingPunct="0">
               <a:lnSpc>
                 <a:spcPct val="200000"/>
               </a:lnSpc>
@@ -7992,39 +8022,7 @@
               </a:spcAft>
               <a:buClrTx/>
               <a:buSzTx/>
-              <a:buFont typeface="Wingdings" panose="05000000000000000000" pitchFamily="2" charset="2"/>
-              <a:buChar char="Ø"/>
-              <a:tabLst/>
-            </a:pPr>
-            <a:r>
-              <a:rPr kumimoji="0" lang="en-US" altLang="en-US" sz="2400" i="0" u="none" strike="noStrike" cap="none" normalizeH="0" baseline="0" dirty="0">
-                <a:ln>
-                  <a:noFill/>
-                </a:ln>
-                <a:solidFill>
-                  <a:schemeClr val="tx1"/>
-                </a:solidFill>
-                <a:effectLst/>
-                <a:latin typeface="Aptos Narrow" panose="020B0004020202020204" pitchFamily="34" charset="0"/>
-              </a:rPr>
-              <a:t>Higher monthly charges (on average) </a:t>
-            </a:r>
-          </a:p>
-          <a:p>
-            <a:pPr marR="0" lvl="0" indent="-342900" algn="l" defTabSz="914400" rtl="0" eaLnBrk="0" fontAlgn="base" latinLnBrk="0" hangingPunct="0">
-              <a:lnSpc>
-                <a:spcPct val="200000"/>
-              </a:lnSpc>
-              <a:spcBef>
-                <a:spcPct val="0"/>
-              </a:spcBef>
-              <a:spcAft>
-                <a:spcPct val="0"/>
-              </a:spcAft>
-              <a:buClrTx/>
-              <a:buSzTx/>
-              <a:buFont typeface="Wingdings" panose="05000000000000000000" pitchFamily="2" charset="2"/>
-              <a:buChar char="Ø"/>
+              <a:buNone/>
               <a:tabLst/>
             </a:pPr>
             <a:r>
